--- a/assets/figures-editable/c3-c4/c3-e17.pptx
+++ b/assets/figures-editable/c3-c4/c3-e17.pptx
@@ -3104,8 +3104,8 @@
         </p:nvSpPr>
         <p:spPr>
           <a:xfrm>
-            <a:off x="274320" y="137160"/>
-            <a:ext cx="11612880" cy="365760"/>
+            <a:off x="274320" y="118872"/>
+            <a:ext cx="11612880" cy="340105"/>
           </a:xfrm>
           <a:prstGeom prst="rect">
             <a:avLst/>
@@ -3114,7 +3114,7 @@
           <a:effectLst/>
         </p:spPr>
         <p:txBody>
-          <a:bodyPr wrap="square" lIns="27432" rIns="27432" tIns="18288" bIns="18288" anchor="ctr">
+          <a:bodyPr wrap="none" lIns="18288" rIns="18288" tIns="18288" bIns="18288" anchor="t">
             <a:spAutoFit/>
           </a:bodyPr>
           <a:lstStyle/>
@@ -3125,7 +3125,7 @@
               </a:spcAft>
             </a:pPr>
             <a:r>
-              <a:rPr sz="2100" b="0" i="0">
+              <a:rPr sz="1900" b="1" i="0">
                 <a:solidFill>
                   <a:srgbClr val="8EDBD4"/>
                 </a:solidFill>
@@ -3136,134 +3136,243 @@
           </a:p>
         </p:txBody>
       </p:sp>
-      <p:cxnSp>
-        <p:nvCxnSpPr>
-          <p:cNvPr id="3" name="C3-E17 line 1" descr="sci-ppt:o001"/>
-          <p:cNvCxnSpPr/>
+      <p:sp>
+        <p:nvSpPr>
+          <p:cNvPr id="3" name="C3-E17 round_rect 1" descr="sci-ppt:o001"/>
+          <p:cNvSpPr/>
           <p:nvPr/>
-        </p:nvCxnSpPr>
-        <p:spPr>
-          <a:xfrm>
-            <a:off x="914400" y="1143000"/>
-            <a:ext cx="2743200" cy="0"/>
-          </a:xfrm>
-          <a:prstGeom prst="line">
+        </p:nvSpPr>
+        <p:spPr>
+          <a:xfrm>
+            <a:off x="365760" y="914400"/>
+            <a:ext cx="5852160" cy="4846320"/>
+          </a:xfrm>
+          <a:prstGeom prst="roundRect">
             <a:avLst/>
           </a:prstGeom>
-          <a:ln w="25400">
+          <a:solidFill>
+            <a:srgbClr val="213E4B"/>
+          </a:solidFill>
+          <a:ln w="20320">
             <a:solidFill>
               <a:srgbClr val="8EDBD4"/>
             </a:solidFill>
           </a:ln>
           <a:effectLst/>
         </p:spPr>
-      </p:cxnSp>
-      <p:cxnSp>
-        <p:nvCxnSpPr>
-          <p:cNvPr id="4" name="C3-E17 line 2" descr="sci-ppt:o002"/>
-          <p:cNvCxnSpPr/>
+        <p:txBody>
+          <a:bodyPr rtlCol="0" anchor="ctr"/>
+          <a:lstStyle/>
+          <a:p>
+            <a:pPr algn="ctr"/>
+          </a:p>
+        </p:txBody>
+      </p:sp>
+      <p:sp>
+        <p:nvSpPr>
+          <p:cNvPr id="4" name="C3-E17 text 2" descr="sci-ppt:o002"/>
+          <p:cNvSpPr txBox="1"/>
           <p:nvPr/>
-        </p:nvCxnSpPr>
-        <p:spPr>
-          <a:xfrm>
-            <a:off x="3657600" y="1143000"/>
-            <a:ext cx="2743200" cy="548640"/>
-          </a:xfrm>
-          <a:prstGeom prst="line">
+        </p:nvSpPr>
+        <p:spPr>
+          <a:xfrm>
+            <a:off x="475488" y="969264"/>
+            <a:ext cx="5632704" cy="254889"/>
+          </a:xfrm>
+          <a:prstGeom prst="rect">
             <a:avLst/>
           </a:prstGeom>
-          <a:ln w="25400">
+          <a:noFill/>
+          <a:effectLst/>
+        </p:spPr>
+        <p:txBody>
+          <a:bodyPr wrap="none" lIns="18288" rIns="18288" tIns="18288" bIns="18288" anchor="t">
+            <a:spAutoFit/>
+          </a:bodyPr>
+          <a:lstStyle/>
+          <a:p>
+            <a:pPr algn="l">
+              <a:spcAft>
+                <a:spcPts val="0"/>
+              </a:spcAft>
+            </a:pPr>
+            <a:r>
+              <a:rPr sz="1350" b="1" i="0">
+                <a:solidFill>
+                  <a:srgbClr val="8EDBD4"/>
+                </a:solidFill>
+                <a:latin typeface="Arial"/>
+              </a:rPr>
+              <a:t>Contracting tube feeding a jet</a:t>
+            </a:r>
+          </a:p>
+        </p:txBody>
+      </p:sp>
+      <p:sp>
+        <p:nvSpPr>
+          <p:cNvPr id="5" name="C3-E17 polygon 3" descr="sci-ppt:o003"/>
+          <p:cNvSpPr/>
+          <p:nvPr/>
+        </p:nvSpPr>
+        <p:spPr>
+          <a:xfrm>
+            <a:off x="731520" y="2194560"/>
+            <a:ext cx="5120640" cy="2103120"/>
+          </a:xfrm>
+          <a:custGeom>
+            <a:avLst/>
+            <a:gdLst/>
+            <a:ahLst/>
+            <a:cxnLst/>
+            <a:rect l="l" t="t" r="r" b="b"/>
+            <a:pathLst>
+              <a:path w="5120640" h="2103120">
+                <a:moveTo>
+                  <a:pt x="0" y="0"/>
+                </a:moveTo>
+                <a:lnTo>
+                  <a:pt x="1645920" y="0"/>
+                </a:lnTo>
+                <a:lnTo>
+                  <a:pt x="3108960" y="731520"/>
+                </a:lnTo>
+                <a:lnTo>
+                  <a:pt x="5120640" y="731520"/>
+                </a:lnTo>
+                <a:lnTo>
+                  <a:pt x="5120640" y="1371600"/>
+                </a:lnTo>
+                <a:lnTo>
+                  <a:pt x="3108960" y="1371600"/>
+                </a:lnTo>
+                <a:lnTo>
+                  <a:pt x="1645920" y="2103120"/>
+                </a:lnTo>
+                <a:lnTo>
+                  <a:pt x="0" y="2103120"/>
+                </a:lnTo>
+                <a:close/>
+              </a:path>
+            </a:pathLst>
+          </a:custGeom>
+          <a:solidFill>
+            <a:srgbClr val="1E4A5A"/>
+          </a:solidFill>
+          <a:ln w="27940">
             <a:solidFill>
               <a:srgbClr val="8EDBD4"/>
             </a:solidFill>
           </a:ln>
           <a:effectLst/>
         </p:spPr>
-      </p:cxnSp>
+        <p:txBody>
+          <a:bodyPr rtlCol="0" anchor="ctr"/>
+          <a:lstStyle/>
+          <a:p>
+            <a:pPr algn="ctr"/>
+          </a:p>
+        </p:txBody>
+      </p:sp>
+      <p:sp>
+        <p:nvSpPr>
+          <p:cNvPr id="6" name="C3-E17 text 4" descr="sci-ppt:o004"/>
+          <p:cNvSpPr txBox="1"/>
+          <p:nvPr/>
+        </p:nvSpPr>
+        <p:spPr>
+          <a:xfrm>
+            <a:off x="822960" y="1554480"/>
+            <a:ext cx="2286000" cy="231648"/>
+          </a:xfrm>
+          <a:prstGeom prst="rect">
+            <a:avLst/>
+          </a:prstGeom>
+          <a:noFill/>
+          <a:effectLst/>
+        </p:spPr>
+        <p:txBody>
+          <a:bodyPr wrap="none" lIns="18288" rIns="18288" tIns="18288" bIns="18288" anchor="t">
+            <a:spAutoFit/>
+          </a:bodyPr>
+          <a:lstStyle/>
+          <a:p>
+            <a:pPr algn="l">
+              <a:spcAft>
+                <a:spcPts val="0"/>
+              </a:spcAft>
+            </a:pPr>
+            <a:r>
+              <a:rPr sz="1200" b="1" i="0">
+                <a:solidFill>
+                  <a:srgbClr val="8EDBD4"/>
+                </a:solidFill>
+                <a:latin typeface="Arial"/>
+              </a:rPr>
+              <a:t>aᵢₙ, Uᵢₙ, pᵢₙ</a:t>
+            </a:r>
+          </a:p>
+        </p:txBody>
+      </p:sp>
+      <p:sp>
+        <p:nvSpPr>
+          <p:cNvPr id="7" name="C3-E17 text 5" descr="sci-ppt:o005"/>
+          <p:cNvSpPr txBox="1"/>
+          <p:nvPr/>
+        </p:nvSpPr>
+        <p:spPr>
+          <a:xfrm>
+            <a:off x="3657600" y="2377440"/>
+            <a:ext cx="2286000" cy="231648"/>
+          </a:xfrm>
+          <a:prstGeom prst="rect">
+            <a:avLst/>
+          </a:prstGeom>
+          <a:noFill/>
+          <a:effectLst/>
+        </p:spPr>
+        <p:txBody>
+          <a:bodyPr wrap="none" lIns="18288" rIns="18288" tIns="18288" bIns="18288" anchor="t">
+            <a:spAutoFit/>
+          </a:bodyPr>
+          <a:lstStyle/>
+          <a:p>
+            <a:pPr algn="l">
+              <a:spcAft>
+                <a:spcPts val="0"/>
+              </a:spcAft>
+            </a:pPr>
+            <a:r>
+              <a:rPr sz="1200" b="1" i="0">
+                <a:solidFill>
+                  <a:srgbClr val="F2B880"/>
+                </a:solidFill>
+                <a:latin typeface="Arial"/>
+              </a:rPr>
+              <a:t>jet aⱼ, Uⱼ</a:t>
+            </a:r>
+          </a:p>
+        </p:txBody>
+      </p:sp>
       <p:cxnSp>
         <p:nvCxnSpPr>
-          <p:cNvPr id="5" name="C3-E17 line 3" descr="sci-ppt:o003"/>
+          <p:cNvPr id="8" name="C3-E17 arrow 6" descr="sci-ppt:o006"/>
           <p:cNvCxnSpPr/>
           <p:nvPr/>
         </p:nvCxnSpPr>
         <p:spPr>
           <a:xfrm>
-            <a:off x="6400800" y="1691640"/>
-            <a:ext cx="4297680" cy="0"/>
+            <a:off x="914400" y="3246120"/>
+            <a:ext cx="1097280" cy="0"/>
           </a:xfrm>
           <a:prstGeom prst="line">
             <a:avLst/>
           </a:prstGeom>
-          <a:ln w="25400">
+          <a:ln w="30480">
             <a:solidFill>
               <a:srgbClr val="8EDBD4"/>
             </a:solidFill>
-          </a:ln>
-          <a:effectLst/>
-        </p:spPr>
-      </p:cxnSp>
-      <p:cxnSp>
-        <p:nvCxnSpPr>
-          <p:cNvPr id="6" name="C3-E17 line 4" descr="sci-ppt:o004"/>
-          <p:cNvCxnSpPr/>
-          <p:nvPr/>
-        </p:nvCxnSpPr>
-        <p:spPr>
-          <a:xfrm>
-            <a:off x="914400" y="2971800"/>
-            <a:ext cx="2743200" cy="0"/>
-          </a:xfrm>
-          <a:prstGeom prst="line">
-            <a:avLst/>
-          </a:prstGeom>
-          <a:ln w="25400">
-            <a:solidFill>
-              <a:srgbClr val="8EDBD4"/>
-            </a:solidFill>
-          </a:ln>
-          <a:effectLst/>
-        </p:spPr>
-      </p:cxnSp>
-      <p:cxnSp>
-        <p:nvCxnSpPr>
-          <p:cNvPr id="7" name="C3-E17 line 5" descr="sci-ppt:o005"/>
-          <p:cNvCxnSpPr/>
-          <p:nvPr/>
-        </p:nvCxnSpPr>
-        <p:spPr>
-          <a:xfrm flipV="1">
-            <a:off x="3657600" y="2423160"/>
-            <a:ext cx="2743200" cy="548640"/>
-          </a:xfrm>
-          <a:prstGeom prst="line">
-            <a:avLst/>
-          </a:prstGeom>
-          <a:ln w="25400">
-            <a:solidFill>
-              <a:srgbClr val="8EDBD4"/>
-            </a:solidFill>
-          </a:ln>
-          <a:effectLst/>
-        </p:spPr>
-      </p:cxnSp>
-      <p:cxnSp>
-        <p:nvCxnSpPr>
-          <p:cNvPr id="8" name="C3-E17 line 6" descr="sci-ppt:o006"/>
-          <p:cNvCxnSpPr/>
-          <p:nvPr/>
-        </p:nvCxnSpPr>
-        <p:spPr>
-          <a:xfrm>
-            <a:off x="6400800" y="2423160"/>
-            <a:ext cx="4297680" cy="0"/>
-          </a:xfrm>
-          <a:prstGeom prst="line">
-            <a:avLst/>
-          </a:prstGeom>
-          <a:ln w="25400">
-            <a:solidFill>
-              <a:srgbClr val="8EDBD4"/>
-            </a:solidFill>
+            <a:headEnd type="none" w="med" len="med"/>
+            <a:tailEnd type="triangle" w="med" len="med"/>
           </a:ln>
           <a:effectLst/>
         </p:spPr>
@@ -3276,15 +3385,15 @@
         </p:nvCxnSpPr>
         <p:spPr>
           <a:xfrm>
-            <a:off x="1188720" y="2057400"/>
-            <a:ext cx="9326880" cy="0"/>
+            <a:off x="4023360" y="3246120"/>
+            <a:ext cx="1737360" cy="0"/>
           </a:xfrm>
           <a:prstGeom prst="line">
             <a:avLst/>
           </a:prstGeom>
-          <a:ln w="25400">
+          <a:ln w="50800">
             <a:solidFill>
-              <a:srgbClr val="8EDBD4"/>
+              <a:srgbClr val="F2B880"/>
             </a:solidFill>
             <a:headEnd type="none" w="med" len="med"/>
             <a:tailEnd type="triangle" w="med" len="med"/>
@@ -3300,8 +3409,8 @@
         </p:nvSpPr>
         <p:spPr>
           <a:xfrm>
-            <a:off x="914400" y="640080"/>
-            <a:ext cx="3657600" cy="365760"/>
+            <a:off x="548640" y="4572000"/>
+            <a:ext cx="5486400" cy="239395"/>
           </a:xfrm>
           <a:prstGeom prst="rect">
             <a:avLst/>
@@ -3310,7 +3419,7 @@
           <a:effectLst/>
         </p:spPr>
         <p:txBody>
-          <a:bodyPr wrap="square" lIns="27432" rIns="27432" tIns="18288" bIns="18288" anchor="ctr">
+          <a:bodyPr wrap="none" lIns="18288" rIns="18288" tIns="18288" bIns="18288" anchor="t">
             <a:spAutoFit/>
           </a:bodyPr>
           <a:lstStyle/>
@@ -3321,13 +3430,13 @@
               </a:spcAft>
             </a:pPr>
             <a:r>
-              <a:rPr sz="1800" b="0" i="0">
+              <a:rPr sz="1250" b="1" i="0">
                 <a:solidFill>
                   <a:srgbClr val="E7F0F3"/>
                 </a:solidFill>
                 <a:latin typeface="Arial"/>
               </a:rPr>
-              <a:t>Solid inlet: a_in, U_in, p_in</a:t>
+              <a:t>Q = π aᵢₙ² Uᵢₙ = π aⱼ² Uⱼ,   α = (aⱼ/aᵢₙ)²</a:t>
             </a:r>
           </a:p>
         </p:txBody>
@@ -3340,8 +3449,8 @@
         </p:nvSpPr>
         <p:spPr>
           <a:xfrm>
-            <a:off x="6675120" y="868680"/>
-            <a:ext cx="4572000" cy="548640"/>
+            <a:off x="548640" y="5029200"/>
+            <a:ext cx="5486400" cy="231648"/>
           </a:xfrm>
           <a:prstGeom prst="rect">
             <a:avLst/>
@@ -3350,7 +3459,7 @@
           <a:effectLst/>
         </p:spPr>
         <p:txBody>
-          <a:bodyPr wrap="square" lIns="27432" rIns="27432" tIns="18288" bIns="18288" anchor="ctr">
+          <a:bodyPr wrap="none" lIns="18288" rIns="18288" tIns="18288" bIns="18288" anchor="t">
             <a:spAutoFit/>
           </a:bodyPr>
           <a:lstStyle/>
@@ -3361,73 +3470,39 @@
               </a:spcAft>
             </a:pPr>
             <a:r>
-              <a:rPr sz="1800" b="0" i="0">
+              <a:rPr sz="1200" b="0" i="0">
                 <a:solidFill>
-                  <a:srgbClr val="E7F0F3"/>
+                  <a:srgbClr val="B4C7D2"/>
                 </a:solidFill>
                 <a:latin typeface="Arial"/>
               </a:rPr>
-              <a:t>Free jet: a_j, U_j</a:t>
-            </a:r>
-          </a:p>
-          <a:p>
-            <a:pPr algn="l">
-              <a:spcAft>
-                <a:spcPts val="0"/>
-              </a:spcAft>
-            </a:pPr>
-            <a:r>
-              <a:rPr sz="1800" b="0" i="0">
-                <a:solidFill>
-                  <a:srgbClr val="E7F0F3"/>
-                </a:solidFill>
-                <a:latin typeface="Arial"/>
-              </a:rPr>
-              <a:t>p_j = p_g + σ_j/a_j</a:t>
-            </a:r>
-          </a:p>
-        </p:txBody>
-      </p:sp>
-      <p:sp>
-        <p:nvSpPr>
-          <p:cNvPr id="12" name="C3-E17 text 10" descr="sci-ppt:o010"/>
-          <p:cNvSpPr txBox="1"/>
+              <a:t>Bernoulli with tension and loss gives the jet speed.</a:t>
+            </a:r>
+          </a:p>
+        </p:txBody>
+      </p:sp>
+      <p:cxnSp>
+        <p:nvCxnSpPr>
+          <p:cNvPr id="12" name="C3-E17 line 10" descr="sci-ppt:o010"/>
+          <p:cNvCxnSpPr/>
           <p:nvPr/>
-        </p:nvSpPr>
-        <p:spPr>
-          <a:xfrm>
-            <a:off x="1097280" y="3383280"/>
-            <a:ext cx="10058400" cy="365760"/>
-          </a:xfrm>
-          <a:prstGeom prst="rect">
+        </p:nvCxnSpPr>
+        <p:spPr>
+          <a:xfrm>
+            <a:off x="7315200" y="4572000"/>
+            <a:ext cx="4480560" cy="0"/>
+          </a:xfrm>
+          <a:prstGeom prst="line">
             <a:avLst/>
           </a:prstGeom>
-          <a:noFill/>
+          <a:ln w="19050">
+            <a:solidFill>
+              <a:srgbClr val="B4C7D2"/>
+            </a:solidFill>
+          </a:ln>
           <a:effectLst/>
         </p:spPr>
-        <p:txBody>
-          <a:bodyPr wrap="square" lIns="27432" rIns="27432" tIns="18288" bIns="18288" anchor="ctr">
-            <a:spAutoFit/>
-          </a:bodyPr>
-          <a:lstStyle/>
-          <a:p>
-            <a:pPr algn="l">
-              <a:spcAft>
-                <a:spcPts val="0"/>
-              </a:spcAft>
-            </a:pPr>
-            <a:r>
-              <a:rPr sz="1700" b="0" i="0">
-                <a:solidFill>
-                  <a:srgbClr val="8EDBD4"/>
-                </a:solidFill>
-                <a:latin typeface="Arial"/>
-              </a:rPr>
-              <a:t>Continuity fixes flux; the pressure budget must support acceleration.</a:t>
-            </a:r>
-          </a:p>
-        </p:txBody>
-      </p:sp>
+      </p:cxnSp>
       <p:cxnSp>
         <p:nvCxnSpPr>
           <p:cNvPr id="13" name="C3-E17 line 11" descr="sci-ppt:o011"/>
@@ -3436,30 +3511,74 @@
         </p:nvCxnSpPr>
         <p:spPr>
           <a:xfrm>
-            <a:off x="274320" y="3977639"/>
-            <a:ext cx="11612880" cy="0"/>
+            <a:off x="7315200" y="1371600"/>
+            <a:ext cx="0" cy="3200400"/>
+          </a:xfrm>
+          <a:prstGeom prst="line">
+            <a:avLst/>
+          </a:prstGeom>
+          <a:ln w="19050">
+            <a:solidFill>
+              <a:srgbClr val="B4C7D2"/>
+            </a:solidFill>
+          </a:ln>
+          <a:effectLst/>
+        </p:spPr>
+      </p:cxnSp>
+      <p:cxnSp>
+        <p:nvCxnSpPr>
+          <p:cNvPr id="14" name="C3-E17 line 12" descr="sci-ppt:o012"/>
+          <p:cNvCxnSpPr/>
+          <p:nvPr/>
+        </p:nvCxnSpPr>
+        <p:spPr>
+          <a:xfrm>
+            <a:off x="7315200" y="4572000"/>
+            <a:ext cx="0" cy="64008"/>
           </a:xfrm>
           <a:prstGeom prst="line">
             <a:avLst/>
           </a:prstGeom>
           <a:ln w="12700">
             <a:solidFill>
-              <a:srgbClr val="405967"/>
+              <a:srgbClr val="B4C7D2"/>
             </a:solidFill>
           </a:ln>
           <a:effectLst/>
         </p:spPr>
       </p:cxnSp>
-      <p:sp>
-        <p:nvSpPr>
-          <p:cNvPr id="14" name="C3-E17 text 12" descr="sci-ppt:o012"/>
+      <p:cxnSp>
+        <p:nvCxnSpPr>
+          <p:cNvPr id="15" name="C3-E17 line 13" descr="sci-ppt:o013"/>
+          <p:cNvCxnSpPr/>
+          <p:nvPr/>
+        </p:nvCxnSpPr>
+        <p:spPr>
+          <a:xfrm>
+            <a:off x="7315200" y="1371600"/>
+            <a:ext cx="0" cy="3200400"/>
+          </a:xfrm>
+          <a:prstGeom prst="line">
+            <a:avLst/>
+          </a:prstGeom>
+          <a:ln w="7620">
+            <a:solidFill>
+              <a:srgbClr val="2E4756"/>
+            </a:solidFill>
+          </a:ln>
+          <a:effectLst/>
+        </p:spPr>
+      </p:cxnSp>
+      <p:sp>
+        <p:nvSpPr>
+          <p:cNvPr id="16" name="C3-E17 text 14" descr="sci-ppt:o014"/>
           <p:cNvSpPr txBox="1"/>
           <p:nvPr/>
         </p:nvSpPr>
         <p:spPr>
           <a:xfrm>
-            <a:off x="320040" y="4096512"/>
-            <a:ext cx="5715000" cy="246888"/>
+            <a:off x="6858000" y="4654296"/>
+            <a:ext cx="914400" cy="208407"/>
           </a:xfrm>
           <a:prstGeom prst="rect">
             <a:avLst/>
@@ -3468,7 +3587,697 @@
           <a:effectLst/>
         </p:spPr>
         <p:txBody>
-          <a:bodyPr wrap="square" lIns="27432" rIns="27432" tIns="18288" bIns="18288" anchor="ctr">
+          <a:bodyPr wrap="none" lIns="18288" rIns="18288" tIns="18288" bIns="18288" anchor="t">
+            <a:spAutoFit/>
+          </a:bodyPr>
+          <a:lstStyle/>
+          <a:p>
+            <a:pPr algn="ctr">
+              <a:spcAft>
+                <a:spcPts val="0"/>
+              </a:spcAft>
+            </a:pPr>
+            <a:r>
+              <a:rPr sz="1050" b="0" i="0">
+                <a:solidFill>
+                  <a:srgbClr val="B4C7D2"/>
+                </a:solidFill>
+                <a:latin typeface="Arial"/>
+              </a:rPr>
+              <a:t>0.00</a:t>
+            </a:r>
+          </a:p>
+        </p:txBody>
+      </p:sp>
+      <p:cxnSp>
+        <p:nvCxnSpPr>
+          <p:cNvPr id="17" name="C3-E17 line 15" descr="sci-ppt:o015"/>
+          <p:cNvCxnSpPr/>
+          <p:nvPr/>
+        </p:nvCxnSpPr>
+        <p:spPr>
+          <a:xfrm>
+            <a:off x="8435340" y="4572000"/>
+            <a:ext cx="0" cy="64008"/>
+          </a:xfrm>
+          <a:prstGeom prst="line">
+            <a:avLst/>
+          </a:prstGeom>
+          <a:ln w="12700">
+            <a:solidFill>
+              <a:srgbClr val="B4C7D2"/>
+            </a:solidFill>
+          </a:ln>
+          <a:effectLst/>
+        </p:spPr>
+      </p:cxnSp>
+      <p:cxnSp>
+        <p:nvCxnSpPr>
+          <p:cNvPr id="18" name="C3-E17 line 16" descr="sci-ppt:o016"/>
+          <p:cNvCxnSpPr/>
+          <p:nvPr/>
+        </p:nvCxnSpPr>
+        <p:spPr>
+          <a:xfrm>
+            <a:off x="8435340" y="1371600"/>
+            <a:ext cx="0" cy="3200400"/>
+          </a:xfrm>
+          <a:prstGeom prst="line">
+            <a:avLst/>
+          </a:prstGeom>
+          <a:ln w="7620">
+            <a:solidFill>
+              <a:srgbClr val="2E4756"/>
+            </a:solidFill>
+          </a:ln>
+          <a:effectLst/>
+        </p:spPr>
+      </p:cxnSp>
+      <p:sp>
+        <p:nvSpPr>
+          <p:cNvPr id="19" name="C3-E17 text 17" descr="sci-ppt:o017"/>
+          <p:cNvSpPr txBox="1"/>
+          <p:nvPr/>
+        </p:nvSpPr>
+        <p:spPr>
+          <a:xfrm>
+            <a:off x="7978140" y="4654296"/>
+            <a:ext cx="914400" cy="208407"/>
+          </a:xfrm>
+          <a:prstGeom prst="rect">
+            <a:avLst/>
+          </a:prstGeom>
+          <a:noFill/>
+          <a:effectLst/>
+        </p:spPr>
+        <p:txBody>
+          <a:bodyPr wrap="none" lIns="18288" rIns="18288" tIns="18288" bIns="18288" anchor="t">
+            <a:spAutoFit/>
+          </a:bodyPr>
+          <a:lstStyle/>
+          <a:p>
+            <a:pPr algn="ctr">
+              <a:spcAft>
+                <a:spcPts val="0"/>
+              </a:spcAft>
+            </a:pPr>
+            <a:r>
+              <a:rPr sz="1050" b="0" i="0">
+                <a:solidFill>
+                  <a:srgbClr val="B4C7D2"/>
+                </a:solidFill>
+                <a:latin typeface="Arial"/>
+              </a:rPr>
+              <a:t>0.25</a:t>
+            </a:r>
+          </a:p>
+        </p:txBody>
+      </p:sp>
+      <p:cxnSp>
+        <p:nvCxnSpPr>
+          <p:cNvPr id="20" name="C3-E17 line 18" descr="sci-ppt:o018"/>
+          <p:cNvCxnSpPr/>
+          <p:nvPr/>
+        </p:nvCxnSpPr>
+        <p:spPr>
+          <a:xfrm>
+            <a:off x="9555480" y="4572000"/>
+            <a:ext cx="0" cy="64008"/>
+          </a:xfrm>
+          <a:prstGeom prst="line">
+            <a:avLst/>
+          </a:prstGeom>
+          <a:ln w="12700">
+            <a:solidFill>
+              <a:srgbClr val="B4C7D2"/>
+            </a:solidFill>
+          </a:ln>
+          <a:effectLst/>
+        </p:spPr>
+      </p:cxnSp>
+      <p:cxnSp>
+        <p:nvCxnSpPr>
+          <p:cNvPr id="21" name="C3-E17 line 19" descr="sci-ppt:o019"/>
+          <p:cNvCxnSpPr/>
+          <p:nvPr/>
+        </p:nvCxnSpPr>
+        <p:spPr>
+          <a:xfrm>
+            <a:off x="9555480" y="1371600"/>
+            <a:ext cx="0" cy="3200400"/>
+          </a:xfrm>
+          <a:prstGeom prst="line">
+            <a:avLst/>
+          </a:prstGeom>
+          <a:ln w="7620">
+            <a:solidFill>
+              <a:srgbClr val="2E4756"/>
+            </a:solidFill>
+          </a:ln>
+          <a:effectLst/>
+        </p:spPr>
+      </p:cxnSp>
+      <p:sp>
+        <p:nvSpPr>
+          <p:cNvPr id="22" name="C3-E17 text 20" descr="sci-ppt:o020"/>
+          <p:cNvSpPr txBox="1"/>
+          <p:nvPr/>
+        </p:nvSpPr>
+        <p:spPr>
+          <a:xfrm>
+            <a:off x="9098280" y="4654296"/>
+            <a:ext cx="914400" cy="208407"/>
+          </a:xfrm>
+          <a:prstGeom prst="rect">
+            <a:avLst/>
+          </a:prstGeom>
+          <a:noFill/>
+          <a:effectLst/>
+        </p:spPr>
+        <p:txBody>
+          <a:bodyPr wrap="none" lIns="18288" rIns="18288" tIns="18288" bIns="18288" anchor="t">
+            <a:spAutoFit/>
+          </a:bodyPr>
+          <a:lstStyle/>
+          <a:p>
+            <a:pPr algn="ctr">
+              <a:spcAft>
+                <a:spcPts val="0"/>
+              </a:spcAft>
+            </a:pPr>
+            <a:r>
+              <a:rPr sz="1050" b="0" i="0">
+                <a:solidFill>
+                  <a:srgbClr val="B4C7D2"/>
+                </a:solidFill>
+                <a:latin typeface="Arial"/>
+              </a:rPr>
+              <a:t>0.50</a:t>
+            </a:r>
+          </a:p>
+        </p:txBody>
+      </p:sp>
+      <p:cxnSp>
+        <p:nvCxnSpPr>
+          <p:cNvPr id="23" name="C3-E17 line 21" descr="sci-ppt:o021"/>
+          <p:cNvCxnSpPr/>
+          <p:nvPr/>
+        </p:nvCxnSpPr>
+        <p:spPr>
+          <a:xfrm>
+            <a:off x="10675620" y="4572000"/>
+            <a:ext cx="0" cy="64008"/>
+          </a:xfrm>
+          <a:prstGeom prst="line">
+            <a:avLst/>
+          </a:prstGeom>
+          <a:ln w="12700">
+            <a:solidFill>
+              <a:srgbClr val="B4C7D2"/>
+            </a:solidFill>
+          </a:ln>
+          <a:effectLst/>
+        </p:spPr>
+      </p:cxnSp>
+      <p:cxnSp>
+        <p:nvCxnSpPr>
+          <p:cNvPr id="24" name="C3-E17 line 22" descr="sci-ppt:o022"/>
+          <p:cNvCxnSpPr/>
+          <p:nvPr/>
+        </p:nvCxnSpPr>
+        <p:spPr>
+          <a:xfrm>
+            <a:off x="10675620" y="1371600"/>
+            <a:ext cx="0" cy="3200400"/>
+          </a:xfrm>
+          <a:prstGeom prst="line">
+            <a:avLst/>
+          </a:prstGeom>
+          <a:ln w="7620">
+            <a:solidFill>
+              <a:srgbClr val="2E4756"/>
+            </a:solidFill>
+          </a:ln>
+          <a:effectLst/>
+        </p:spPr>
+      </p:cxnSp>
+      <p:sp>
+        <p:nvSpPr>
+          <p:cNvPr id="25" name="C3-E17 text 23" descr="sci-ppt:o023"/>
+          <p:cNvSpPr txBox="1"/>
+          <p:nvPr/>
+        </p:nvSpPr>
+        <p:spPr>
+          <a:xfrm>
+            <a:off x="10218420" y="4654296"/>
+            <a:ext cx="914400" cy="208407"/>
+          </a:xfrm>
+          <a:prstGeom prst="rect">
+            <a:avLst/>
+          </a:prstGeom>
+          <a:noFill/>
+          <a:effectLst/>
+        </p:spPr>
+        <p:txBody>
+          <a:bodyPr wrap="none" lIns="18288" rIns="18288" tIns="18288" bIns="18288" anchor="t">
+            <a:spAutoFit/>
+          </a:bodyPr>
+          <a:lstStyle/>
+          <a:p>
+            <a:pPr algn="ctr">
+              <a:spcAft>
+                <a:spcPts val="0"/>
+              </a:spcAft>
+            </a:pPr>
+            <a:r>
+              <a:rPr sz="1050" b="0" i="0">
+                <a:solidFill>
+                  <a:srgbClr val="B4C7D2"/>
+                </a:solidFill>
+                <a:latin typeface="Arial"/>
+              </a:rPr>
+              <a:t>0.75</a:t>
+            </a:r>
+          </a:p>
+        </p:txBody>
+      </p:sp>
+      <p:cxnSp>
+        <p:nvCxnSpPr>
+          <p:cNvPr id="26" name="C3-E17 line 24" descr="sci-ppt:o024"/>
+          <p:cNvCxnSpPr/>
+          <p:nvPr/>
+        </p:nvCxnSpPr>
+        <p:spPr>
+          <a:xfrm>
+            <a:off x="11795760" y="4572000"/>
+            <a:ext cx="0" cy="64008"/>
+          </a:xfrm>
+          <a:prstGeom prst="line">
+            <a:avLst/>
+          </a:prstGeom>
+          <a:ln w="12700">
+            <a:solidFill>
+              <a:srgbClr val="B4C7D2"/>
+            </a:solidFill>
+          </a:ln>
+          <a:effectLst/>
+        </p:spPr>
+      </p:cxnSp>
+      <p:cxnSp>
+        <p:nvCxnSpPr>
+          <p:cNvPr id="27" name="C3-E17 line 25" descr="sci-ppt:o025"/>
+          <p:cNvCxnSpPr/>
+          <p:nvPr/>
+        </p:nvCxnSpPr>
+        <p:spPr>
+          <a:xfrm>
+            <a:off x="11795760" y="1371600"/>
+            <a:ext cx="0" cy="3200400"/>
+          </a:xfrm>
+          <a:prstGeom prst="line">
+            <a:avLst/>
+          </a:prstGeom>
+          <a:ln w="7620">
+            <a:solidFill>
+              <a:srgbClr val="2E4756"/>
+            </a:solidFill>
+          </a:ln>
+          <a:effectLst/>
+        </p:spPr>
+      </p:cxnSp>
+      <p:sp>
+        <p:nvSpPr>
+          <p:cNvPr id="28" name="C3-E17 text 26" descr="sci-ppt:o026"/>
+          <p:cNvSpPr txBox="1"/>
+          <p:nvPr/>
+        </p:nvSpPr>
+        <p:spPr>
+          <a:xfrm>
+            <a:off x="11338560" y="4654296"/>
+            <a:ext cx="914400" cy="208407"/>
+          </a:xfrm>
+          <a:prstGeom prst="rect">
+            <a:avLst/>
+          </a:prstGeom>
+          <a:noFill/>
+          <a:effectLst/>
+        </p:spPr>
+        <p:txBody>
+          <a:bodyPr wrap="none" lIns="18288" rIns="18288" tIns="18288" bIns="18288" anchor="t">
+            <a:spAutoFit/>
+          </a:bodyPr>
+          <a:lstStyle/>
+          <a:p>
+            <a:pPr algn="ctr">
+              <a:spcAft>
+                <a:spcPts val="0"/>
+              </a:spcAft>
+            </a:pPr>
+            <a:r>
+              <a:rPr sz="1050" b="0" i="0">
+                <a:solidFill>
+                  <a:srgbClr val="B4C7D2"/>
+                </a:solidFill>
+                <a:latin typeface="Arial"/>
+              </a:rPr>
+              <a:t>1.00</a:t>
+            </a:r>
+          </a:p>
+        </p:txBody>
+      </p:sp>
+      <p:cxnSp>
+        <p:nvCxnSpPr>
+          <p:cNvPr id="29" name="C3-E17 line 27" descr="sci-ppt:o027"/>
+          <p:cNvCxnSpPr/>
+          <p:nvPr/>
+        </p:nvCxnSpPr>
+        <p:spPr>
+          <a:xfrm>
+            <a:off x="7251192" y="4572000"/>
+            <a:ext cx="64008" cy="0"/>
+          </a:xfrm>
+          <a:prstGeom prst="line">
+            <a:avLst/>
+          </a:prstGeom>
+          <a:ln w="12700">
+            <a:solidFill>
+              <a:srgbClr val="B4C7D2"/>
+            </a:solidFill>
+          </a:ln>
+          <a:effectLst/>
+        </p:spPr>
+      </p:cxnSp>
+      <p:cxnSp>
+        <p:nvCxnSpPr>
+          <p:cNvPr id="30" name="C3-E17 line 28" descr="sci-ppt:o028"/>
+          <p:cNvCxnSpPr/>
+          <p:nvPr/>
+        </p:nvCxnSpPr>
+        <p:spPr>
+          <a:xfrm>
+            <a:off x="7251192" y="3505200"/>
+            <a:ext cx="64008" cy="0"/>
+          </a:xfrm>
+          <a:prstGeom prst="line">
+            <a:avLst/>
+          </a:prstGeom>
+          <a:ln w="12700">
+            <a:solidFill>
+              <a:srgbClr val="B4C7D2"/>
+            </a:solidFill>
+          </a:ln>
+          <a:effectLst/>
+        </p:spPr>
+      </p:cxnSp>
+      <p:cxnSp>
+        <p:nvCxnSpPr>
+          <p:cNvPr id="31" name="C3-E17 line 29" descr="sci-ppt:o029"/>
+          <p:cNvCxnSpPr/>
+          <p:nvPr/>
+        </p:nvCxnSpPr>
+        <p:spPr>
+          <a:xfrm>
+            <a:off x="7315200" y="3505200"/>
+            <a:ext cx="4480560" cy="0"/>
+          </a:xfrm>
+          <a:prstGeom prst="line">
+            <a:avLst/>
+          </a:prstGeom>
+          <a:ln w="7620">
+            <a:solidFill>
+              <a:srgbClr val="2E4756"/>
+            </a:solidFill>
+          </a:ln>
+          <a:effectLst/>
+        </p:spPr>
+      </p:cxnSp>
+      <p:sp>
+        <p:nvSpPr>
+          <p:cNvPr id="32" name="C3-E17 text 30" descr="sci-ppt:o030"/>
+          <p:cNvSpPr txBox="1"/>
+          <p:nvPr/>
+        </p:nvSpPr>
+        <p:spPr>
+          <a:xfrm>
+            <a:off x="6446520" y="3422904"/>
+            <a:ext cx="777240" cy="208407"/>
+          </a:xfrm>
+          <a:prstGeom prst="rect">
+            <a:avLst/>
+          </a:prstGeom>
+          <a:noFill/>
+          <a:effectLst/>
+        </p:spPr>
+        <p:txBody>
+          <a:bodyPr wrap="none" lIns="18288" rIns="18288" tIns="18288" bIns="18288" anchor="t">
+            <a:spAutoFit/>
+          </a:bodyPr>
+          <a:lstStyle/>
+          <a:p>
+            <a:pPr algn="r">
+              <a:spcAft>
+                <a:spcPts val="0"/>
+              </a:spcAft>
+            </a:pPr>
+            <a:r>
+              <a:rPr sz="1050" b="0" i="0">
+                <a:solidFill>
+                  <a:srgbClr val="B4C7D2"/>
+                </a:solidFill>
+                <a:latin typeface="Arial"/>
+              </a:rPr>
+              <a:t>2</a:t>
+            </a:r>
+          </a:p>
+        </p:txBody>
+      </p:sp>
+      <p:cxnSp>
+        <p:nvCxnSpPr>
+          <p:cNvPr id="33" name="C3-E17 line 31" descr="sci-ppt:o031"/>
+          <p:cNvCxnSpPr/>
+          <p:nvPr/>
+        </p:nvCxnSpPr>
+        <p:spPr>
+          <a:xfrm>
+            <a:off x="7251192" y="2438400"/>
+            <a:ext cx="64008" cy="0"/>
+          </a:xfrm>
+          <a:prstGeom prst="line">
+            <a:avLst/>
+          </a:prstGeom>
+          <a:ln w="12700">
+            <a:solidFill>
+              <a:srgbClr val="B4C7D2"/>
+            </a:solidFill>
+          </a:ln>
+          <a:effectLst/>
+        </p:spPr>
+      </p:cxnSp>
+      <p:cxnSp>
+        <p:nvCxnSpPr>
+          <p:cNvPr id="34" name="C3-E17 line 32" descr="sci-ppt:o032"/>
+          <p:cNvCxnSpPr/>
+          <p:nvPr/>
+        </p:nvCxnSpPr>
+        <p:spPr>
+          <a:xfrm>
+            <a:off x="7315200" y="2438400"/>
+            <a:ext cx="4480560" cy="0"/>
+          </a:xfrm>
+          <a:prstGeom prst="line">
+            <a:avLst/>
+          </a:prstGeom>
+          <a:ln w="7620">
+            <a:solidFill>
+              <a:srgbClr val="2E4756"/>
+            </a:solidFill>
+          </a:ln>
+          <a:effectLst/>
+        </p:spPr>
+      </p:cxnSp>
+      <p:sp>
+        <p:nvSpPr>
+          <p:cNvPr id="35" name="C3-E17 text 33" descr="sci-ppt:o033"/>
+          <p:cNvSpPr txBox="1"/>
+          <p:nvPr/>
+        </p:nvSpPr>
+        <p:spPr>
+          <a:xfrm>
+            <a:off x="6446520" y="2356104"/>
+            <a:ext cx="777240" cy="208407"/>
+          </a:xfrm>
+          <a:prstGeom prst="rect">
+            <a:avLst/>
+          </a:prstGeom>
+          <a:noFill/>
+          <a:effectLst/>
+        </p:spPr>
+        <p:txBody>
+          <a:bodyPr wrap="none" lIns="18288" rIns="18288" tIns="18288" bIns="18288" anchor="t">
+            <a:spAutoFit/>
+          </a:bodyPr>
+          <a:lstStyle/>
+          <a:p>
+            <a:pPr algn="r">
+              <a:spcAft>
+                <a:spcPts val="0"/>
+              </a:spcAft>
+            </a:pPr>
+            <a:r>
+              <a:rPr sz="1050" b="0" i="0">
+                <a:solidFill>
+                  <a:srgbClr val="B4C7D2"/>
+                </a:solidFill>
+                <a:latin typeface="Arial"/>
+              </a:rPr>
+              <a:t>3</a:t>
+            </a:r>
+          </a:p>
+        </p:txBody>
+      </p:sp>
+      <p:cxnSp>
+        <p:nvCxnSpPr>
+          <p:cNvPr id="36" name="C3-E17 line 34" descr="sci-ppt:o034"/>
+          <p:cNvCxnSpPr/>
+          <p:nvPr/>
+        </p:nvCxnSpPr>
+        <p:spPr>
+          <a:xfrm>
+            <a:off x="7251192" y="1371600"/>
+            <a:ext cx="64008" cy="0"/>
+          </a:xfrm>
+          <a:prstGeom prst="line">
+            <a:avLst/>
+          </a:prstGeom>
+          <a:ln w="12700">
+            <a:solidFill>
+              <a:srgbClr val="B4C7D2"/>
+            </a:solidFill>
+          </a:ln>
+          <a:effectLst/>
+        </p:spPr>
+      </p:cxnSp>
+      <p:cxnSp>
+        <p:nvCxnSpPr>
+          <p:cNvPr id="37" name="C3-E17 line 35" descr="sci-ppt:o035"/>
+          <p:cNvCxnSpPr/>
+          <p:nvPr/>
+        </p:nvCxnSpPr>
+        <p:spPr>
+          <a:xfrm>
+            <a:off x="7315200" y="1371600"/>
+            <a:ext cx="4480560" cy="0"/>
+          </a:xfrm>
+          <a:prstGeom prst="line">
+            <a:avLst/>
+          </a:prstGeom>
+          <a:ln w="7620">
+            <a:solidFill>
+              <a:srgbClr val="2E4756"/>
+            </a:solidFill>
+          </a:ln>
+          <a:effectLst/>
+        </p:spPr>
+      </p:cxnSp>
+      <p:sp>
+        <p:nvSpPr>
+          <p:cNvPr id="38" name="C3-E17 text 36" descr="sci-ppt:o036"/>
+          <p:cNvSpPr txBox="1"/>
+          <p:nvPr/>
+        </p:nvSpPr>
+        <p:spPr>
+          <a:xfrm>
+            <a:off x="6446520" y="1289304"/>
+            <a:ext cx="777240" cy="208407"/>
+          </a:xfrm>
+          <a:prstGeom prst="rect">
+            <a:avLst/>
+          </a:prstGeom>
+          <a:noFill/>
+          <a:effectLst/>
+        </p:spPr>
+        <p:txBody>
+          <a:bodyPr wrap="none" lIns="18288" rIns="18288" tIns="18288" bIns="18288" anchor="t">
+            <a:spAutoFit/>
+          </a:bodyPr>
+          <a:lstStyle/>
+          <a:p>
+            <a:pPr algn="r">
+              <a:spcAft>
+                <a:spcPts val="0"/>
+              </a:spcAft>
+            </a:pPr>
+            <a:r>
+              <a:rPr sz="1050" b="0" i="0">
+                <a:solidFill>
+                  <a:srgbClr val="B4C7D2"/>
+                </a:solidFill>
+                <a:latin typeface="Arial"/>
+              </a:rPr>
+              <a:t>4</a:t>
+            </a:r>
+          </a:p>
+        </p:txBody>
+      </p:sp>
+      <p:sp>
+        <p:nvSpPr>
+          <p:cNvPr id="39" name="C3-E17 text 37" descr="sci-ppt:o037"/>
+          <p:cNvSpPr txBox="1"/>
+          <p:nvPr/>
+        </p:nvSpPr>
+        <p:spPr>
+          <a:xfrm>
+            <a:off x="7315200" y="4855464"/>
+            <a:ext cx="4480560" cy="231648"/>
+          </a:xfrm>
+          <a:prstGeom prst="rect">
+            <a:avLst/>
+          </a:prstGeom>
+          <a:noFill/>
+          <a:effectLst/>
+        </p:spPr>
+        <p:txBody>
+          <a:bodyPr wrap="none" lIns="18288" rIns="18288" tIns="18288" bIns="18288" anchor="t">
+            <a:spAutoFit/>
+          </a:bodyPr>
+          <a:lstStyle/>
+          <a:p>
+            <a:pPr algn="ctr">
+              <a:spcAft>
+                <a:spcPts val="0"/>
+              </a:spcAft>
+            </a:pPr>
+            <a:r>
+              <a:rPr sz="1200" b="0" i="0">
+                <a:solidFill>
+                  <a:srgbClr val="E7F0F3"/>
+                </a:solidFill>
+                <a:latin typeface="Arial"/>
+              </a:rPr>
+              <a:t>area ratio α</a:t>
+            </a:r>
+          </a:p>
+        </p:txBody>
+      </p:sp>
+      <p:sp>
+        <p:nvSpPr>
+          <p:cNvPr id="40" name="C3-E17 text 38" descr="sci-ppt:o038"/>
+          <p:cNvSpPr txBox="1"/>
+          <p:nvPr/>
+        </p:nvSpPr>
+        <p:spPr>
+          <a:xfrm>
+            <a:off x="6766560" y="1024128"/>
+            <a:ext cx="4480560" cy="231648"/>
+          </a:xfrm>
+          <a:prstGeom prst="rect">
+            <a:avLst/>
+          </a:prstGeom>
+          <a:noFill/>
+          <a:effectLst/>
+        </p:spPr>
+        <p:txBody>
+          <a:bodyPr wrap="none" lIns="18288" rIns="18288" tIns="18288" bIns="18288" anchor="t">
             <a:spAutoFit/>
           </a:bodyPr>
           <a:lstStyle/>
@@ -3479,27 +4288,697 @@
               </a:spcAft>
             </a:pPr>
             <a:r>
-              <a:rPr sz="1150" b="0" i="0">
+              <a:rPr sz="1200" b="0" i="0">
                 <a:solidFill>
-                  <a:srgbClr val="B4C7D2"/>
+                  <a:srgbClr val="E7F0F3"/>
                 </a:solidFill>
                 <a:latin typeface="Arial"/>
               </a:rPr>
-              <a:t>• a_in solid inlet; U_in, p_in</a:t>
-            </a:r>
-          </a:p>
-        </p:txBody>
-      </p:sp>
-      <p:sp>
-        <p:nvSpPr>
-          <p:cNvPr id="15" name="C3-E17 text 13" descr="sci-ppt:o013"/>
+              <a:t>Uⱼ / √(2Δ/ρ)</a:t>
+            </a:r>
+          </a:p>
+        </p:txBody>
+      </p:sp>
+      <p:sp>
+        <p:nvSpPr>
+          <p:cNvPr id="41" name="C3-E17 polygon 39" descr="sci-ppt:o039"/>
+          <p:cNvSpPr/>
+          <p:nvPr/>
+        </p:nvSpPr>
+        <p:spPr>
+          <a:xfrm>
+            <a:off x="7319680" y="2222305"/>
+            <a:ext cx="4252052" cy="2349694"/>
+          </a:xfrm>
+          <a:custGeom>
+            <a:avLst/>
+            <a:gdLst/>
+            <a:ahLst/>
+            <a:cxnLst/>
+            <a:rect l="l" t="t" r="r" b="b"/>
+            <a:pathLst>
+              <a:path w="4252052" h="2349694">
+                <a:moveTo>
+                  <a:pt x="0" y="2349694"/>
+                </a:moveTo>
+                <a:lnTo>
+                  <a:pt x="21367" y="2349677"/>
+                </a:lnTo>
+                <a:lnTo>
+                  <a:pt x="42734" y="2349635"/>
+                </a:lnTo>
+                <a:lnTo>
+                  <a:pt x="64101" y="2349570"/>
+                </a:lnTo>
+                <a:lnTo>
+                  <a:pt x="85468" y="2349479"/>
+                </a:lnTo>
+                <a:lnTo>
+                  <a:pt x="106836" y="2349365"/>
+                </a:lnTo>
+                <a:lnTo>
+                  <a:pt x="128203" y="2349226"/>
+                </a:lnTo>
+                <a:lnTo>
+                  <a:pt x="149570" y="2349063"/>
+                </a:lnTo>
+                <a:lnTo>
+                  <a:pt x="170937" y="2348876"/>
+                </a:lnTo>
+                <a:lnTo>
+                  <a:pt x="192304" y="2348664"/>
+                </a:lnTo>
+                <a:lnTo>
+                  <a:pt x="213671" y="2348428"/>
+                </a:lnTo>
+                <a:lnTo>
+                  <a:pt x="235038" y="2348167"/>
+                </a:lnTo>
+                <a:lnTo>
+                  <a:pt x="256405" y="2347882"/>
+                </a:lnTo>
+                <a:lnTo>
+                  <a:pt x="277772" y="2347571"/>
+                </a:lnTo>
+                <a:lnTo>
+                  <a:pt x="299139" y="2347237"/>
+                </a:lnTo>
+                <a:lnTo>
+                  <a:pt x="320506" y="2346877"/>
+                </a:lnTo>
+                <a:lnTo>
+                  <a:pt x="341874" y="2346493"/>
+                </a:lnTo>
+                <a:lnTo>
+                  <a:pt x="363241" y="2346084"/>
+                </a:lnTo>
+                <a:lnTo>
+                  <a:pt x="384608" y="2345649"/>
+                </a:lnTo>
+                <a:lnTo>
+                  <a:pt x="405975" y="2345190"/>
+                </a:lnTo>
+                <a:lnTo>
+                  <a:pt x="427342" y="2344705"/>
+                </a:lnTo>
+                <a:lnTo>
+                  <a:pt x="448709" y="2344195"/>
+                </a:lnTo>
+                <a:lnTo>
+                  <a:pt x="470076" y="2343660"/>
+                </a:lnTo>
+                <a:lnTo>
+                  <a:pt x="491443" y="2343099"/>
+                </a:lnTo>
+                <a:lnTo>
+                  <a:pt x="512810" y="2342513"/>
+                </a:lnTo>
+                <a:lnTo>
+                  <a:pt x="534177" y="2341901"/>
+                </a:lnTo>
+                <a:lnTo>
+                  <a:pt x="555544" y="2341263"/>
+                </a:lnTo>
+                <a:lnTo>
+                  <a:pt x="576912" y="2340598"/>
+                </a:lnTo>
+                <a:lnTo>
+                  <a:pt x="598279" y="2339908"/>
+                </a:lnTo>
+                <a:lnTo>
+                  <a:pt x="619646" y="2339192"/>
+                </a:lnTo>
+                <a:lnTo>
+                  <a:pt x="641013" y="2338449"/>
+                </a:lnTo>
+                <a:lnTo>
+                  <a:pt x="662380" y="2337679"/>
+                </a:lnTo>
+                <a:lnTo>
+                  <a:pt x="683747" y="2336882"/>
+                </a:lnTo>
+                <a:lnTo>
+                  <a:pt x="705114" y="2336059"/>
+                </a:lnTo>
+                <a:lnTo>
+                  <a:pt x="726481" y="2335208"/>
+                </a:lnTo>
+                <a:lnTo>
+                  <a:pt x="747848" y="2334330"/>
+                </a:lnTo>
+                <a:lnTo>
+                  <a:pt x="769215" y="2333425"/>
+                </a:lnTo>
+                <a:lnTo>
+                  <a:pt x="790582" y="2332492"/>
+                </a:lnTo>
+                <a:lnTo>
+                  <a:pt x="811950" y="2331531"/>
+                </a:lnTo>
+                <a:lnTo>
+                  <a:pt x="833317" y="2330541"/>
+                </a:lnTo>
+                <a:lnTo>
+                  <a:pt x="854684" y="2329524"/>
+                </a:lnTo>
+                <a:lnTo>
+                  <a:pt x="876051" y="2328477"/>
+                </a:lnTo>
+                <a:lnTo>
+                  <a:pt x="897418" y="2327402"/>
+                </a:lnTo>
+                <a:lnTo>
+                  <a:pt x="918785" y="2326298"/>
+                </a:lnTo>
+                <a:lnTo>
+                  <a:pt x="940152" y="2325165"/>
+                </a:lnTo>
+                <a:lnTo>
+                  <a:pt x="961519" y="2324001"/>
+                </a:lnTo>
+                <a:lnTo>
+                  <a:pt x="982886" y="2322808"/>
+                </a:lnTo>
+                <a:lnTo>
+                  <a:pt x="1004253" y="2321585"/>
+                </a:lnTo>
+                <a:lnTo>
+                  <a:pt x="1025621" y="2320332"/>
+                </a:lnTo>
+                <a:lnTo>
+                  <a:pt x="1046988" y="2319048"/>
+                </a:lnTo>
+                <a:lnTo>
+                  <a:pt x="1068355" y="2317732"/>
+                </a:lnTo>
+                <a:lnTo>
+                  <a:pt x="1089722" y="2316386"/>
+                </a:lnTo>
+                <a:lnTo>
+                  <a:pt x="1111089" y="2315007"/>
+                </a:lnTo>
+                <a:lnTo>
+                  <a:pt x="1132456" y="2313597"/>
+                </a:lnTo>
+                <a:lnTo>
+                  <a:pt x="1153823" y="2312154"/>
+                </a:lnTo>
+                <a:lnTo>
+                  <a:pt x="1175190" y="2310679"/>
+                </a:lnTo>
+                <a:lnTo>
+                  <a:pt x="1196557" y="2309170"/>
+                </a:lnTo>
+                <a:lnTo>
+                  <a:pt x="1217924" y="2307628"/>
+                </a:lnTo>
+                <a:lnTo>
+                  <a:pt x="1239291" y="2306053"/>
+                </a:lnTo>
+                <a:lnTo>
+                  <a:pt x="1260659" y="2304443"/>
+                </a:lnTo>
+                <a:lnTo>
+                  <a:pt x="1282026" y="2302798"/>
+                </a:lnTo>
+                <a:lnTo>
+                  <a:pt x="1303393" y="2301119"/>
+                </a:lnTo>
+                <a:lnTo>
+                  <a:pt x="1324760" y="2299404"/>
+                </a:lnTo>
+                <a:lnTo>
+                  <a:pt x="1346127" y="2297653"/>
+                </a:lnTo>
+                <a:lnTo>
+                  <a:pt x="1367494" y="2295865"/>
+                </a:lnTo>
+                <a:lnTo>
+                  <a:pt x="1388861" y="2294041"/>
+                </a:lnTo>
+                <a:lnTo>
+                  <a:pt x="1410228" y="2292180"/>
+                </a:lnTo>
+                <a:lnTo>
+                  <a:pt x="1431595" y="2290280"/>
+                </a:lnTo>
+                <a:lnTo>
+                  <a:pt x="1452962" y="2288343"/>
+                </a:lnTo>
+                <a:lnTo>
+                  <a:pt x="1474329" y="2286366"/>
+                </a:lnTo>
+                <a:lnTo>
+                  <a:pt x="1495697" y="2284350"/>
+                </a:lnTo>
+                <a:lnTo>
+                  <a:pt x="1517064" y="2282294"/>
+                </a:lnTo>
+                <a:lnTo>
+                  <a:pt x="1538431" y="2280197"/>
+                </a:lnTo>
+                <a:lnTo>
+                  <a:pt x="1559798" y="2278060"/>
+                </a:lnTo>
+                <a:lnTo>
+                  <a:pt x="1581165" y="2275880"/>
+                </a:lnTo>
+                <a:lnTo>
+                  <a:pt x="1602532" y="2273658"/>
+                </a:lnTo>
+                <a:lnTo>
+                  <a:pt x="1623899" y="2271393"/>
+                </a:lnTo>
+                <a:lnTo>
+                  <a:pt x="1645266" y="2269085"/>
+                </a:lnTo>
+                <a:lnTo>
+                  <a:pt x="1666633" y="2266732"/>
+                </a:lnTo>
+                <a:lnTo>
+                  <a:pt x="1688000" y="2264333"/>
+                </a:lnTo>
+                <a:lnTo>
+                  <a:pt x="1709367" y="2261890"/>
+                </a:lnTo>
+                <a:lnTo>
+                  <a:pt x="1730735" y="2259399"/>
+                </a:lnTo>
+                <a:lnTo>
+                  <a:pt x="1752102" y="2256861"/>
+                </a:lnTo>
+                <a:lnTo>
+                  <a:pt x="1773469" y="2254275"/>
+                </a:lnTo>
+                <a:lnTo>
+                  <a:pt x="1794836" y="2251640"/>
+                </a:lnTo>
+                <a:lnTo>
+                  <a:pt x="1816203" y="2248955"/>
+                </a:lnTo>
+                <a:lnTo>
+                  <a:pt x="1837570" y="2246220"/>
+                </a:lnTo>
+                <a:lnTo>
+                  <a:pt x="1858937" y="2243433"/>
+                </a:lnTo>
+                <a:lnTo>
+                  <a:pt x="1880304" y="2240593"/>
+                </a:lnTo>
+                <a:lnTo>
+                  <a:pt x="1901671" y="2237700"/>
+                </a:lnTo>
+                <a:lnTo>
+                  <a:pt x="1923038" y="2234753"/>
+                </a:lnTo>
+                <a:lnTo>
+                  <a:pt x="1944405" y="2231750"/>
+                </a:lnTo>
+                <a:lnTo>
+                  <a:pt x="1965773" y="2228691"/>
+                </a:lnTo>
+                <a:lnTo>
+                  <a:pt x="1987140" y="2225574"/>
+                </a:lnTo>
+                <a:lnTo>
+                  <a:pt x="2008507" y="2222398"/>
+                </a:lnTo>
+                <a:lnTo>
+                  <a:pt x="2029874" y="2219163"/>
+                </a:lnTo>
+                <a:lnTo>
+                  <a:pt x="2051241" y="2215866"/>
+                </a:lnTo>
+                <a:lnTo>
+                  <a:pt x="2072608" y="2212508"/>
+                </a:lnTo>
+                <a:lnTo>
+                  <a:pt x="2093975" y="2209085"/>
+                </a:lnTo>
+                <a:lnTo>
+                  <a:pt x="2115342" y="2205598"/>
+                </a:lnTo>
+                <a:lnTo>
+                  <a:pt x="2136709" y="2202045"/>
+                </a:lnTo>
+                <a:lnTo>
+                  <a:pt x="2158076" y="2198424"/>
+                </a:lnTo>
+                <a:lnTo>
+                  <a:pt x="2179444" y="2194734"/>
+                </a:lnTo>
+                <a:lnTo>
+                  <a:pt x="2200811" y="2190974"/>
+                </a:lnTo>
+                <a:lnTo>
+                  <a:pt x="2222178" y="2187142"/>
+                </a:lnTo>
+                <a:lnTo>
+                  <a:pt x="2243545" y="2183235"/>
+                </a:lnTo>
+                <a:lnTo>
+                  <a:pt x="2264912" y="2179254"/>
+                </a:lnTo>
+                <a:lnTo>
+                  <a:pt x="2286279" y="2175196"/>
+                </a:lnTo>
+                <a:lnTo>
+                  <a:pt x="2307646" y="2171058"/>
+                </a:lnTo>
+                <a:lnTo>
+                  <a:pt x="2329013" y="2166840"/>
+                </a:lnTo>
+                <a:lnTo>
+                  <a:pt x="2350380" y="2162540"/>
+                </a:lnTo>
+                <a:lnTo>
+                  <a:pt x="2371747" y="2158155"/>
+                </a:lnTo>
+                <a:lnTo>
+                  <a:pt x="2393114" y="2153684"/>
+                </a:lnTo>
+                <a:lnTo>
+                  <a:pt x="2414482" y="2149123"/>
+                </a:lnTo>
+                <a:lnTo>
+                  <a:pt x="2435849" y="2144472"/>
+                </a:lnTo>
+                <a:lnTo>
+                  <a:pt x="2457216" y="2139728"/>
+                </a:lnTo>
+                <a:lnTo>
+                  <a:pt x="2478583" y="2134888"/>
+                </a:lnTo>
+                <a:lnTo>
+                  <a:pt x="2499950" y="2129950"/>
+                </a:lnTo>
+                <a:lnTo>
+                  <a:pt x="2521317" y="2124912"/>
+                </a:lnTo>
+                <a:lnTo>
+                  <a:pt x="2542684" y="2119770"/>
+                </a:lnTo>
+                <a:lnTo>
+                  <a:pt x="2564051" y="2114523"/>
+                </a:lnTo>
+                <a:lnTo>
+                  <a:pt x="2585418" y="2109166"/>
+                </a:lnTo>
+                <a:lnTo>
+                  <a:pt x="2606785" y="2103698"/>
+                </a:lnTo>
+                <a:lnTo>
+                  <a:pt x="2628152" y="2098115"/>
+                </a:lnTo>
+                <a:lnTo>
+                  <a:pt x="2649520" y="2092413"/>
+                </a:lnTo>
+                <a:lnTo>
+                  <a:pt x="2670887" y="2086590"/>
+                </a:lnTo>
+                <a:lnTo>
+                  <a:pt x="2692254" y="2080641"/>
+                </a:lnTo>
+                <a:lnTo>
+                  <a:pt x="2713621" y="2074564"/>
+                </a:lnTo>
+                <a:lnTo>
+                  <a:pt x="2734988" y="2068354"/>
+                </a:lnTo>
+                <a:lnTo>
+                  <a:pt x="2756355" y="2062008"/>
+                </a:lnTo>
+                <a:lnTo>
+                  <a:pt x="2777722" y="2055520"/>
+                </a:lnTo>
+                <a:lnTo>
+                  <a:pt x="2799089" y="2048888"/>
+                </a:lnTo>
+                <a:lnTo>
+                  <a:pt x="2820456" y="2042105"/>
+                </a:lnTo>
+                <a:lnTo>
+                  <a:pt x="2841823" y="2035169"/>
+                </a:lnTo>
+                <a:lnTo>
+                  <a:pt x="2863190" y="2028072"/>
+                </a:lnTo>
+                <a:lnTo>
+                  <a:pt x="2884558" y="2020811"/>
+                </a:lnTo>
+                <a:lnTo>
+                  <a:pt x="2905925" y="2013379"/>
+                </a:lnTo>
+                <a:lnTo>
+                  <a:pt x="2927292" y="2005771"/>
+                </a:lnTo>
+                <a:lnTo>
+                  <a:pt x="2948659" y="1997981"/>
+                </a:lnTo>
+                <a:lnTo>
+                  <a:pt x="2970026" y="1990003"/>
+                </a:lnTo>
+                <a:lnTo>
+                  <a:pt x="2991393" y="1981829"/>
+                </a:lnTo>
+                <a:lnTo>
+                  <a:pt x="3012760" y="1973453"/>
+                </a:lnTo>
+                <a:lnTo>
+                  <a:pt x="3034127" y="1964868"/>
+                </a:lnTo>
+                <a:lnTo>
+                  <a:pt x="3055494" y="1956065"/>
+                </a:lnTo>
+                <a:lnTo>
+                  <a:pt x="3076861" y="1947037"/>
+                </a:lnTo>
+                <a:lnTo>
+                  <a:pt x="3098228" y="1937775"/>
+                </a:lnTo>
+                <a:lnTo>
+                  <a:pt x="3119596" y="1928269"/>
+                </a:lnTo>
+                <a:lnTo>
+                  <a:pt x="3140963" y="1918510"/>
+                </a:lnTo>
+                <a:lnTo>
+                  <a:pt x="3162330" y="1908489"/>
+                </a:lnTo>
+                <a:lnTo>
+                  <a:pt x="3183697" y="1898194"/>
+                </a:lnTo>
+                <a:lnTo>
+                  <a:pt x="3205064" y="1887613"/>
+                </a:lnTo>
+                <a:lnTo>
+                  <a:pt x="3226431" y="1876736"/>
+                </a:lnTo>
+                <a:lnTo>
+                  <a:pt x="3247798" y="1865548"/>
+                </a:lnTo>
+                <a:lnTo>
+                  <a:pt x="3269165" y="1854036"/>
+                </a:lnTo>
+                <a:lnTo>
+                  <a:pt x="3290532" y="1842187"/>
+                </a:lnTo>
+                <a:lnTo>
+                  <a:pt x="3311899" y="1829983"/>
+                </a:lnTo>
+                <a:lnTo>
+                  <a:pt x="3333267" y="1817410"/>
+                </a:lnTo>
+                <a:lnTo>
+                  <a:pt x="3354634" y="1804450"/>
+                </a:lnTo>
+                <a:lnTo>
+                  <a:pt x="3376001" y="1791083"/>
+                </a:lnTo>
+                <a:lnTo>
+                  <a:pt x="3397368" y="1777290"/>
+                </a:lnTo>
+                <a:lnTo>
+                  <a:pt x="3418735" y="1763050"/>
+                </a:lnTo>
+                <a:lnTo>
+                  <a:pt x="3440102" y="1748339"/>
+                </a:lnTo>
+                <a:lnTo>
+                  <a:pt x="3461469" y="1733133"/>
+                </a:lnTo>
+                <a:lnTo>
+                  <a:pt x="3482836" y="1717405"/>
+                </a:lnTo>
+                <a:lnTo>
+                  <a:pt x="3504203" y="1701128"/>
+                </a:lnTo>
+                <a:lnTo>
+                  <a:pt x="3525570" y="1684269"/>
+                </a:lnTo>
+                <a:lnTo>
+                  <a:pt x="3546937" y="1666797"/>
+                </a:lnTo>
+                <a:lnTo>
+                  <a:pt x="3568305" y="1648674"/>
+                </a:lnTo>
+                <a:lnTo>
+                  <a:pt x="3589672" y="1629863"/>
+                </a:lnTo>
+                <a:lnTo>
+                  <a:pt x="3611039" y="1610320"/>
+                </a:lnTo>
+                <a:lnTo>
+                  <a:pt x="3632406" y="1590000"/>
+                </a:lnTo>
+                <a:lnTo>
+                  <a:pt x="3653773" y="1568852"/>
+                </a:lnTo>
+                <a:lnTo>
+                  <a:pt x="3675140" y="1546822"/>
+                </a:lnTo>
+                <a:lnTo>
+                  <a:pt x="3696507" y="1523849"/>
+                </a:lnTo>
+                <a:lnTo>
+                  <a:pt x="3717874" y="1499867"/>
+                </a:lnTo>
+                <a:lnTo>
+                  <a:pt x="3739241" y="1474803"/>
+                </a:lnTo>
+                <a:lnTo>
+                  <a:pt x="3760608" y="1448577"/>
+                </a:lnTo>
+                <a:lnTo>
+                  <a:pt x="3781975" y="1421101"/>
+                </a:lnTo>
+                <a:lnTo>
+                  <a:pt x="3803343" y="1392274"/>
+                </a:lnTo>
+                <a:lnTo>
+                  <a:pt x="3824710" y="1361988"/>
+                </a:lnTo>
+                <a:lnTo>
+                  <a:pt x="3846077" y="1330119"/>
+                </a:lnTo>
+                <a:lnTo>
+                  <a:pt x="3867444" y="1296529"/>
+                </a:lnTo>
+                <a:lnTo>
+                  <a:pt x="3888811" y="1261063"/>
+                </a:lnTo>
+                <a:lnTo>
+                  <a:pt x="3910178" y="1223544"/>
+                </a:lnTo>
+                <a:lnTo>
+                  <a:pt x="3931545" y="1183772"/>
+                </a:lnTo>
+                <a:lnTo>
+                  <a:pt x="3952912" y="1141520"/>
+                </a:lnTo>
+                <a:lnTo>
+                  <a:pt x="3974279" y="1096526"/>
+                </a:lnTo>
+                <a:lnTo>
+                  <a:pt x="3995646" y="1048486"/>
+                </a:lnTo>
+                <a:lnTo>
+                  <a:pt x="4017013" y="997049"/>
+                </a:lnTo>
+                <a:lnTo>
+                  <a:pt x="4038381" y="941806"/>
+                </a:lnTo>
+                <a:lnTo>
+                  <a:pt x="4059748" y="882271"/>
+                </a:lnTo>
+                <a:lnTo>
+                  <a:pt x="4081115" y="817872"/>
+                </a:lnTo>
+                <a:lnTo>
+                  <a:pt x="4102482" y="747920"/>
+                </a:lnTo>
+                <a:lnTo>
+                  <a:pt x="4123849" y="671584"/>
+                </a:lnTo>
+                <a:lnTo>
+                  <a:pt x="4145216" y="587846"/>
+                </a:lnTo>
+                <a:lnTo>
+                  <a:pt x="4166583" y="495446"/>
+                </a:lnTo>
+                <a:lnTo>
+                  <a:pt x="4187950" y="392805"/>
+                </a:lnTo>
+                <a:lnTo>
+                  <a:pt x="4209317" y="277906"/>
+                </a:lnTo>
+                <a:lnTo>
+                  <a:pt x="4230684" y="148129"/>
+                </a:lnTo>
+                <a:lnTo>
+                  <a:pt x="4252052" y="0"/>
+                </a:lnTo>
+              </a:path>
+            </a:pathLst>
+          </a:custGeom>
+          <a:noFill/>
+          <a:ln w="38100">
+            <a:solidFill>
+              <a:srgbClr val="8EDBD4"/>
+            </a:solidFill>
+          </a:ln>
+          <a:effectLst/>
+        </p:spPr>
+        <p:txBody>
+          <a:bodyPr rtlCol="0" anchor="ctr"/>
+          <a:lstStyle/>
+          <a:p>
+            <a:pPr algn="ctr"/>
+          </a:p>
+        </p:txBody>
+      </p:sp>
+      <p:sp>
+        <p:nvSpPr>
+          <p:cNvPr id="42" name="C3-E17 ellipse 40" descr="sci-ppt:o040"/>
+          <p:cNvSpPr/>
+          <p:nvPr/>
+        </p:nvSpPr>
+        <p:spPr>
+          <a:xfrm>
+            <a:off x="7522083" y="4496758"/>
+            <a:ext cx="146304" cy="146304"/>
+          </a:xfrm>
+          <a:prstGeom prst="ellipse">
+            <a:avLst/>
+          </a:prstGeom>
+          <a:solidFill>
+            <a:srgbClr val="F2B880"/>
+          </a:solidFill>
+          <a:ln w="12700">
+            <a:solidFill>
+              <a:srgbClr val="F2B880"/>
+            </a:solidFill>
+          </a:ln>
+          <a:effectLst/>
+        </p:spPr>
+        <p:txBody>
+          <a:bodyPr rtlCol="0" anchor="ctr"/>
+          <a:lstStyle/>
+          <a:p>
+            <a:pPr algn="ctr"/>
+          </a:p>
+        </p:txBody>
+      </p:sp>
+      <p:sp>
+        <p:nvSpPr>
+          <p:cNvPr id="43" name="C3-E17 text 41" descr="sci-ppt:o041"/>
           <p:cNvSpPr txBox="1"/>
           <p:nvPr/>
         </p:nvSpPr>
         <p:spPr>
           <a:xfrm>
-            <a:off x="6217920" y="4096512"/>
-            <a:ext cx="5715000" cy="246888"/>
+            <a:off x="7836408" y="4290060"/>
+            <a:ext cx="3017520" cy="223900"/>
           </a:xfrm>
           <a:prstGeom prst="rect">
             <a:avLst/>
@@ -3508,7 +4987,7 @@
           <a:effectLst/>
         </p:spPr>
         <p:txBody>
-          <a:bodyPr wrap="square" lIns="27432" rIns="27432" tIns="18288" bIns="18288" anchor="ctr">
+          <a:bodyPr wrap="none" lIns="18288" rIns="18288" tIns="18288" bIns="18288" anchor="t">
             <a:spAutoFit/>
           </a:bodyPr>
           <a:lstStyle/>
@@ -3521,25 +5000,25 @@
             <a:r>
               <a:rPr sz="1150" b="0" i="0">
                 <a:solidFill>
-                  <a:srgbClr val="B4C7D2"/>
+                  <a:srgbClr val="F2B880"/>
                 </a:solidFill>
                 <a:latin typeface="Arial"/>
               </a:rPr>
-              <a:t>• a_j free outlet; U_j</a:t>
-            </a:r>
-          </a:p>
-        </p:txBody>
-      </p:sp>
-      <p:sp>
-        <p:nvSpPr>
-          <p:cNvPr id="16" name="C3-E17 text 14" descr="sci-ppt:o014"/>
+              <a:t>α = 0.0625 (aⱼ/aᵢₙ = 1/4): 1.002</a:t>
+            </a:r>
+          </a:p>
+        </p:txBody>
+      </p:sp>
+      <p:sp>
+        <p:nvSpPr>
+          <p:cNvPr id="44" name="C3-E17 text 42" descr="sci-ppt:o042"/>
           <p:cNvSpPr txBox="1"/>
           <p:nvPr/>
         </p:nvSpPr>
         <p:spPr>
           <a:xfrm>
-            <a:off x="320040" y="4329684"/>
-            <a:ext cx="5715000" cy="246888"/>
+            <a:off x="9404604" y="1706880"/>
+            <a:ext cx="2011680" cy="223900"/>
           </a:xfrm>
           <a:prstGeom prst="rect">
             <a:avLst/>
@@ -3548,7 +5027,7 @@
           <a:effectLst/>
         </p:spPr>
         <p:txBody>
-          <a:bodyPr wrap="square" lIns="27432" rIns="27432" tIns="18288" bIns="18288" anchor="ctr">
+          <a:bodyPr wrap="none" lIns="18288" rIns="18288" tIns="18288" bIns="18288" anchor="t">
             <a:spAutoFit/>
           </a:bodyPr>
           <a:lstStyle/>
@@ -3561,25 +5040,25 @@
             <a:r>
               <a:rPr sz="1150" b="0" i="0">
                 <a:solidFill>
-                  <a:srgbClr val="B4C7D2"/>
+                  <a:srgbClr val="F28BA0"/>
                 </a:solidFill>
                 <a:latin typeface="Arial"/>
               </a:rPr>
-              <a:t>• Q = inlet flux = outlet flux</a:t>
-            </a:r>
-          </a:p>
-        </p:txBody>
-      </p:sp>
-      <p:sp>
-        <p:nvSpPr>
-          <p:cNvPr id="17" name="C3-E17 text 15" descr="sci-ppt:o015"/>
+              <a:t>diverges as α → 1</a:t>
+            </a:r>
+          </a:p>
+        </p:txBody>
+      </p:sp>
+      <p:sp>
+        <p:nvSpPr>
+          <p:cNvPr id="45" name="C3-E17 text 43" descr="sci-ppt:o043"/>
           <p:cNvSpPr txBox="1"/>
           <p:nvPr/>
         </p:nvSpPr>
         <p:spPr>
           <a:xfrm>
-            <a:off x="6217920" y="4329684"/>
-            <a:ext cx="5715000" cy="246888"/>
+            <a:off x="6675120" y="5303520"/>
+            <a:ext cx="5120640" cy="417576"/>
           </a:xfrm>
           <a:prstGeom prst="rect">
             <a:avLst/>
@@ -3588,7 +5067,7 @@
           <a:effectLst/>
         </p:spPr>
         <p:txBody>
-          <a:bodyPr wrap="square" lIns="27432" rIns="27432" tIns="18288" bIns="18288" anchor="ctr">
+          <a:bodyPr wrap="none" lIns="18288" rIns="18288" tIns="18288" bIns="18288" anchor="t">
             <a:spAutoFit/>
           </a:bodyPr>
           <a:lstStyle/>
@@ -3599,27 +5078,43 @@
               </a:spcAft>
             </a:pPr>
             <a:r>
-              <a:rPr sz="1150" b="0" i="0">
+              <a:rPr sz="1200" b="1" i="0">
                 <a:solidFill>
-                  <a:srgbClr val="B4C7D2"/>
+                  <a:srgbClr val="E7F0F3"/>
                 </a:solidFill>
                 <a:latin typeface="Arial"/>
               </a:rPr>
-              <a:t>• p_g outside jet</a:t>
-            </a:r>
-          </a:p>
-        </p:txBody>
-      </p:sp>
-      <p:sp>
-        <p:nvSpPr>
-          <p:cNvPr id="18" name="C3-E17 text 16" descr="sci-ppt:o016"/>
+              <a:t>Uⱼ = √{ 2[pᵢₙ − p_g − σⱼ/aⱼ − Δpₗₒₛₛ] / [ρ(1 − α²)] },  0 &lt; α &lt;</a:t>
+            </a:r>
+          </a:p>
+          <a:p>
+            <a:pPr algn="l">
+              <a:spcAft>
+                <a:spcPts val="0"/>
+              </a:spcAft>
+            </a:pPr>
+            <a:r>
+              <a:rPr sz="1200" b="1" i="0">
+                <a:solidFill>
+                  <a:srgbClr val="E7F0F3"/>
+                </a:solidFill>
+                <a:latin typeface="Arial"/>
+              </a:rPr>
+              <a:t>1.</a:t>
+            </a:r>
+          </a:p>
+        </p:txBody>
+      </p:sp>
+      <p:sp>
+        <p:nvSpPr>
+          <p:cNvPr id="46" name="C3-E17 text 44" descr="sci-ppt:o044"/>
           <p:cNvSpPr txBox="1"/>
           <p:nvPr/>
         </p:nvSpPr>
         <p:spPr>
           <a:xfrm>
-            <a:off x="320040" y="4562856"/>
-            <a:ext cx="5715000" cy="246888"/>
+            <a:off x="457200" y="5806440"/>
+            <a:ext cx="11338560" cy="239395"/>
           </a:xfrm>
           <a:prstGeom prst="rect">
             <a:avLst/>
@@ -3628,7 +5123,7 @@
           <a:effectLst/>
         </p:spPr>
         <p:txBody>
-          <a:bodyPr wrap="square" lIns="27432" rIns="27432" tIns="18288" bIns="18288" anchor="ctr">
+          <a:bodyPr wrap="none" lIns="18288" rIns="18288" tIns="18288" bIns="18288" anchor="t">
             <a:spAutoFit/>
           </a:bodyPr>
           <a:lstStyle/>
@@ -3639,27 +5134,27 @@
               </a:spcAft>
             </a:pPr>
             <a:r>
-              <a:rPr sz="1150" b="0" i="0">
+              <a:rPr sz="1250" b="0" i="0">
                 <a:solidFill>
-                  <a:srgbClr val="B4C7D2"/>
+                  <a:srgbClr val="F2B880"/>
                 </a:solidFill>
                 <a:latin typeface="Arial"/>
               </a:rPr>
-              <a:t>• σ_j/a_j outlet capillary pressure</a:t>
-            </a:r>
-          </a:p>
-        </p:txBody>
-      </p:sp>
-      <p:sp>
-        <p:nvSpPr>
-          <p:cNvPr id="19" name="C3-E17 text 17" descr="sci-ppt:o017"/>
+              <a:t>Specify either the source pressure or the flow, then solve for the compatible rest. Valid for a steady, inviscid core only.</a:t>
+            </a:r>
+          </a:p>
+        </p:txBody>
+      </p:sp>
+      <p:sp>
+        <p:nvSpPr>
+          <p:cNvPr id="47" name="C3-E17 text 45" descr="sci-ppt:o045"/>
           <p:cNvSpPr txBox="1"/>
           <p:nvPr/>
         </p:nvSpPr>
         <p:spPr>
           <a:xfrm>
-            <a:off x="6217920" y="4562856"/>
-            <a:ext cx="5715000" cy="246888"/>
+            <a:off x="320040" y="6510528"/>
+            <a:ext cx="11521440" cy="200660"/>
           </a:xfrm>
           <a:prstGeom prst="rect">
             <a:avLst/>
@@ -3668,127 +5163,7 @@
           <a:effectLst/>
         </p:spPr>
         <p:txBody>
-          <a:bodyPr wrap="square" lIns="27432" rIns="27432" tIns="18288" bIns="18288" anchor="ctr">
-            <a:spAutoFit/>
-          </a:bodyPr>
-          <a:lstStyle/>
-          <a:p>
-            <a:pPr algn="l">
-              <a:spcAft>
-                <a:spcPts val="0"/>
-              </a:spcAft>
-            </a:pPr>
-            <a:r>
-              <a:rPr sz="1150" b="0" i="0">
-                <a:solidFill>
-                  <a:srgbClr val="B4C7D2"/>
-                </a:solidFill>
-                <a:latin typeface="Arial"/>
-              </a:rPr>
-              <a:t>• ρ, α, Δp_loss: budget legend</a:t>
-            </a:r>
-          </a:p>
-        </p:txBody>
-      </p:sp>
-      <p:sp>
-        <p:nvSpPr>
-          <p:cNvPr id="20" name="C3-E17 text 18" descr="sci-ppt:o018"/>
-          <p:cNvSpPr txBox="1"/>
-          <p:nvPr/>
-        </p:nvSpPr>
-        <p:spPr>
-          <a:xfrm>
-            <a:off x="320040" y="5596128"/>
-            <a:ext cx="11430000" cy="292608"/>
-          </a:xfrm>
-          <a:prstGeom prst="rect">
-            <a:avLst/>
-          </a:prstGeom>
-          <a:noFill/>
-          <a:effectLst/>
-        </p:spPr>
-        <p:txBody>
-          <a:bodyPr wrap="square" lIns="27432" rIns="27432" tIns="18288" bIns="18288" anchor="ctr">
-            <a:spAutoFit/>
-          </a:bodyPr>
-          <a:lstStyle/>
-          <a:p>
-            <a:pPr algn="l">
-              <a:spcAft>
-                <a:spcPts val="0"/>
-              </a:spcAft>
-            </a:pPr>
-            <a:r>
-              <a:rPr sz="1150" b="0" i="0">
-                <a:solidFill>
-                  <a:srgbClr val="8EDBD4"/>
-                </a:solidFill>
-                <a:latin typeface="Arial"/>
-              </a:rPr>
-              <a:t>A solid inlet has no imposed σ_j/a_in free-surface jump</a:t>
-            </a:r>
-          </a:p>
-        </p:txBody>
-      </p:sp>
-      <p:sp>
-        <p:nvSpPr>
-          <p:cNvPr id="21" name="C3-E17 text 19" descr="sci-ppt:o019"/>
-          <p:cNvSpPr txBox="1"/>
-          <p:nvPr/>
-        </p:nvSpPr>
-        <p:spPr>
-          <a:xfrm>
-            <a:off x="320040" y="5870448"/>
-            <a:ext cx="11430000" cy="292608"/>
-          </a:xfrm>
-          <a:prstGeom prst="rect">
-            <a:avLst/>
-          </a:prstGeom>
-          <a:noFill/>
-          <a:effectLst/>
-        </p:spPr>
-        <p:txBody>
-          <a:bodyPr wrap="square" lIns="27432" rIns="27432" tIns="18288" bIns="18288" anchor="ctr">
-            <a:spAutoFit/>
-          </a:bodyPr>
-          <a:lstStyle/>
-          <a:p>
-            <a:pPr algn="l">
-              <a:spcAft>
-                <a:spcPts val="0"/>
-              </a:spcAft>
-            </a:pPr>
-            <a:r>
-              <a:rPr sz="1150" b="0" i="0">
-                <a:solidFill>
-                  <a:srgbClr val="8EDBD4"/>
-                </a:solidFill>
-                <a:latin typeface="Arial"/>
-              </a:rPr>
-              <a:t>Required pressure rises with speed gain</a:t>
-            </a:r>
-          </a:p>
-        </p:txBody>
-      </p:sp>
-      <p:sp>
-        <p:nvSpPr>
-          <p:cNvPr id="22" name="C3-E17 text 20" descr="sci-ppt:o020"/>
-          <p:cNvSpPr txBox="1"/>
-          <p:nvPr/>
-        </p:nvSpPr>
-        <p:spPr>
-          <a:xfrm>
-            <a:off x="320040" y="6473952"/>
-            <a:ext cx="11430000" cy="256032"/>
-          </a:xfrm>
-          <a:prstGeom prst="rect">
-            <a:avLst/>
-          </a:prstGeom>
-          <a:noFill/>
-          <a:effectLst/>
-        </p:spPr>
-        <p:txBody>
-          <a:bodyPr wrap="square" lIns="27432" rIns="27432" tIns="18288" bIns="18288" anchor="ctr">
+          <a:bodyPr wrap="none" lIns="18288" rIns="18288" tIns="18288" bIns="18288" anchor="t">
             <a:spAutoFit/>
           </a:bodyPr>
           <a:lstStyle/>
@@ -3805,7 +5180,7 @@
                 </a:solidFill>
                 <a:latin typeface="Arial"/>
               </a:rPr>
-              <a:t>Model schematic; geometry is not to scale.</a:t>
+              <a:t>Continuity + Bernoulli benchmark of Eq. C3-E17; Δ = pᵢₙ − p_g − σⱼ/aⱼ − Δpₗₒₛₛ.</a:t>
             </a:r>
           </a:p>
         </p:txBody>
